--- a/lesson-utils/mitchs-web-server-lecture.pptx
+++ b/lesson-utils/mitchs-web-server-lecture.pptx
@@ -5,7 +5,7 @@
     <p:sldMasterId id="2147483648" r:id="rId1"/>
   </p:sldMasterIdLst>
   <p:notesMasterIdLst>
-    <p:notesMasterId r:id="rId13"/>
+    <p:notesMasterId r:id="rId15"/>
   </p:notesMasterIdLst>
   <p:sldIdLst>
     <p:sldId id="256" r:id="rId2"/>
@@ -18,7 +18,9 @@
     <p:sldId id="263" r:id="rId9"/>
     <p:sldId id="264" r:id="rId10"/>
     <p:sldId id="265" r:id="rId11"/>
-    <p:sldId id="266" r:id="rId12"/>
+    <p:sldId id="268" r:id="rId12"/>
+    <p:sldId id="269" r:id="rId13"/>
+    <p:sldId id="266" r:id="rId14"/>
   </p:sldIdLst>
   <p:sldSz cx="9144000" cy="6858000" type="screen4x3"/>
   <p:notesSz cx="6858000" cy="9144000"/>
@@ -1170,6 +1172,434 @@
 </p:notes>
 </file>
 
+<file path=ppt/notesSlides/notesSlide10.xml><?xml version="1.0" encoding="utf-8"?>
+<p:notes xmlns:a="http://schemas.openxmlformats.org/drawingml/2006/main" xmlns:r="http://schemas.openxmlformats.org/officeDocument/2006/relationships" xmlns:p="http://schemas.openxmlformats.org/presentationml/2006/main">
+  <p:cSld>
+    <p:spTree>
+      <p:nvGrpSpPr>
+        <p:cNvPr id="1" name="">
+          <a:extLst>
+            <a:ext uri="{FF2B5EF4-FFF2-40B4-BE49-F238E27FC236}">
+              <a16:creationId xmlns:a16="http://schemas.microsoft.com/office/drawing/2014/main" id="{C5079D07-528E-A320-69D5-42835BF8165C}"/>
+            </a:ext>
+          </a:extLst>
+        </p:cNvPr>
+        <p:cNvGrpSpPr/>
+        <p:nvPr/>
+      </p:nvGrpSpPr>
+      <p:grpSpPr>
+        <a:xfrm>
+          <a:off x="0" y="0"/>
+          <a:ext cx="0" cy="0"/>
+          <a:chOff x="0" y="0"/>
+          <a:chExt cx="0" cy="0"/>
+        </a:xfrm>
+      </p:grpSpPr>
+      <p:sp>
+        <p:nvSpPr>
+          <p:cNvPr id="2" name="Slide Image Placeholder 1">
+            <a:extLst>
+              <a:ext uri="{FF2B5EF4-FFF2-40B4-BE49-F238E27FC236}">
+                <a16:creationId xmlns:a16="http://schemas.microsoft.com/office/drawing/2014/main" id="{2FD1329D-55D5-53A1-8195-14CCDA09B6ED}"/>
+              </a:ext>
+            </a:extLst>
+          </p:cNvPr>
+          <p:cNvSpPr>
+            <a:spLocks noGrp="1" noRot="1" noChangeAspect="1"/>
+          </p:cNvSpPr>
+          <p:nvPr>
+            <p:ph type="sldImg"/>
+          </p:nvPr>
+        </p:nvSpPr>
+        <p:spPr/>
+      </p:sp>
+      <p:sp>
+        <p:nvSpPr>
+          <p:cNvPr id="3" name="Notes Placeholder 2">
+            <a:extLst>
+              <a:ext uri="{FF2B5EF4-FFF2-40B4-BE49-F238E27FC236}">
+                <a16:creationId xmlns:a16="http://schemas.microsoft.com/office/drawing/2014/main" id="{9209ECB6-6B32-C464-82EE-524D0A9BD5EE}"/>
+              </a:ext>
+            </a:extLst>
+          </p:cNvPr>
+          <p:cNvSpPr>
+            <a:spLocks noGrp="1"/>
+          </p:cNvSpPr>
+          <p:nvPr>
+            <p:ph type="body" idx="1"/>
+          </p:nvPr>
+        </p:nvSpPr>
+        <p:spPr/>
+        <p:txBody>
+          <a:bodyPr/>
+          <a:lstStyle/>
+          <a:p>
+            <a:r>
+              <a:rPr lang="en-US" b="0" dirty="0">
+                <a:solidFill>
+                  <a:srgbClr val="B5B3AA"/>
+                </a:solidFill>
+                <a:effectLst/>
+                <a:latin typeface="Consolas" panose="020B0609020204030204" pitchFamily="49" charset="0"/>
+              </a:rPr>
+              <a:t>do not use too many brain cells pinning down their basic tools. [] but if you're creating a server, which means you're doing what's called backend engineering, you can do anything. you can write your code in any language, using any or multiple of a million frameworks and libraries people have created for you, you can read and write to files, you can integrate with databases, you can run other unrelated programs from inside your program, anything. we're staring [next slide] into the abyss, here. </a:t>
+            </a:r>
+            <a:endParaRPr lang="en-US" b="0" dirty="0">
+              <a:solidFill>
+                <a:srgbClr val="DDDDDD"/>
+              </a:solidFill>
+              <a:effectLst/>
+              <a:latin typeface="Consolas" panose="020B0609020204030204" pitchFamily="49" charset="0"/>
+            </a:endParaRPr>
+          </a:p>
+        </p:txBody>
+      </p:sp>
+      <p:sp>
+        <p:nvSpPr>
+          <p:cNvPr id="4" name="Slide Number Placeholder 3">
+            <a:extLst>
+              <a:ext uri="{FF2B5EF4-FFF2-40B4-BE49-F238E27FC236}">
+                <a16:creationId xmlns:a16="http://schemas.microsoft.com/office/drawing/2014/main" id="{4759DAA3-83AA-48E8-2B7C-F73BBC74A27A}"/>
+              </a:ext>
+            </a:extLst>
+          </p:cNvPr>
+          <p:cNvSpPr>
+            <a:spLocks noGrp="1"/>
+          </p:cNvSpPr>
+          <p:nvPr>
+            <p:ph type="sldNum" sz="quarter" idx="5"/>
+          </p:nvPr>
+        </p:nvSpPr>
+        <p:spPr/>
+        <p:txBody>
+          <a:bodyPr/>
+          <a:lstStyle/>
+          <a:p>
+            <a:fld id="{02DFA6AD-67CC-4248-91A0-32DAE947B1E4}" type="slidenum">
+              <a:rPr lang="en-US" altLang="en-US" smtClean="0"/>
+              <a:pPr/>
+              <a:t>11</a:t>
+            </a:fld>
+            <a:endParaRPr lang="en-US" altLang="en-US"/>
+          </a:p>
+        </p:txBody>
+      </p:sp>
+    </p:spTree>
+    <p:extLst>
+      <p:ext uri="{BB962C8B-B14F-4D97-AF65-F5344CB8AC3E}">
+        <p14:creationId xmlns:p14="http://schemas.microsoft.com/office/powerpoint/2010/main" val="2171906001"/>
+      </p:ext>
+    </p:extLst>
+  </p:cSld>
+  <p:clrMapOvr>
+    <a:masterClrMapping/>
+  </p:clrMapOvr>
+</p:notes>
+</file>
+
+<file path=ppt/notesSlides/notesSlide11.xml><?xml version="1.0" encoding="utf-8"?>
+<p:notes xmlns:a="http://schemas.openxmlformats.org/drawingml/2006/main" xmlns:r="http://schemas.openxmlformats.org/officeDocument/2006/relationships" xmlns:p="http://schemas.openxmlformats.org/presentationml/2006/main">
+  <p:cSld>
+    <p:spTree>
+      <p:nvGrpSpPr>
+        <p:cNvPr id="1" name="">
+          <a:extLst>
+            <a:ext uri="{FF2B5EF4-FFF2-40B4-BE49-F238E27FC236}">
+              <a16:creationId xmlns:a16="http://schemas.microsoft.com/office/drawing/2014/main" id="{3B65812E-EFC2-1247-E4DD-4B6839A6BD06}"/>
+            </a:ext>
+          </a:extLst>
+        </p:cNvPr>
+        <p:cNvGrpSpPr/>
+        <p:nvPr/>
+      </p:nvGrpSpPr>
+      <p:grpSpPr>
+        <a:xfrm>
+          <a:off x="0" y="0"/>
+          <a:ext cx="0" cy="0"/>
+          <a:chOff x="0" y="0"/>
+          <a:chExt cx="0" cy="0"/>
+        </a:xfrm>
+      </p:grpSpPr>
+      <p:sp>
+        <p:nvSpPr>
+          <p:cNvPr id="2" name="Slide Image Placeholder 1">
+            <a:extLst>
+              <a:ext uri="{FF2B5EF4-FFF2-40B4-BE49-F238E27FC236}">
+                <a16:creationId xmlns:a16="http://schemas.microsoft.com/office/drawing/2014/main" id="{317E0426-F9B7-077E-8FBE-87AB72570FC4}"/>
+              </a:ext>
+            </a:extLst>
+          </p:cNvPr>
+          <p:cNvSpPr>
+            <a:spLocks noGrp="1" noRot="1" noChangeAspect="1"/>
+          </p:cNvSpPr>
+          <p:nvPr>
+            <p:ph type="sldImg"/>
+          </p:nvPr>
+        </p:nvSpPr>
+        <p:spPr/>
+      </p:sp>
+      <p:sp>
+        <p:nvSpPr>
+          <p:cNvPr id="3" name="Notes Placeholder 2">
+            <a:extLst>
+              <a:ext uri="{FF2B5EF4-FFF2-40B4-BE49-F238E27FC236}">
+                <a16:creationId xmlns:a16="http://schemas.microsoft.com/office/drawing/2014/main" id="{F60F2D50-C227-6E4A-0326-6B00A845491C}"/>
+              </a:ext>
+            </a:extLst>
+          </p:cNvPr>
+          <p:cNvSpPr>
+            <a:spLocks noGrp="1"/>
+          </p:cNvSpPr>
+          <p:nvPr>
+            <p:ph type="body" idx="1"/>
+          </p:nvPr>
+        </p:nvSpPr>
+        <p:spPr/>
+        <p:txBody>
+          <a:bodyPr/>
+          <a:lstStyle/>
+          <a:p>
+            <a:r>
+              <a:rPr lang="en-US" b="0" dirty="0">
+                <a:solidFill>
+                  <a:srgbClr val="B5B3AA"/>
+                </a:solidFill>
+                <a:effectLst/>
+                <a:latin typeface="Consolas" panose="020B0609020204030204" pitchFamily="49" charset="0"/>
+              </a:rPr>
+              <a:t>we're staring into the abyss, here. [] we're not trapped in the browser anymore, but we are caught in the prison of having decisions to make.</a:t>
+            </a:r>
+            <a:endParaRPr lang="en-US" b="0" dirty="0">
+              <a:solidFill>
+                <a:srgbClr val="DDDDDD"/>
+              </a:solidFill>
+              <a:effectLst/>
+              <a:latin typeface="Consolas" panose="020B0609020204030204" pitchFamily="49" charset="0"/>
+            </a:endParaRPr>
+          </a:p>
+        </p:txBody>
+      </p:sp>
+      <p:sp>
+        <p:nvSpPr>
+          <p:cNvPr id="4" name="Slide Number Placeholder 3">
+            <a:extLst>
+              <a:ext uri="{FF2B5EF4-FFF2-40B4-BE49-F238E27FC236}">
+                <a16:creationId xmlns:a16="http://schemas.microsoft.com/office/drawing/2014/main" id="{25E3F102-4566-39CE-32B0-C42DE2EFC0D2}"/>
+              </a:ext>
+            </a:extLst>
+          </p:cNvPr>
+          <p:cNvSpPr>
+            <a:spLocks noGrp="1"/>
+          </p:cNvSpPr>
+          <p:nvPr>
+            <p:ph type="sldNum" sz="quarter" idx="5"/>
+          </p:nvPr>
+        </p:nvSpPr>
+        <p:spPr/>
+        <p:txBody>
+          <a:bodyPr/>
+          <a:lstStyle/>
+          <a:p>
+            <a:fld id="{02DFA6AD-67CC-4248-91A0-32DAE947B1E4}" type="slidenum">
+              <a:rPr lang="en-US" altLang="en-US" smtClean="0"/>
+              <a:pPr/>
+              <a:t>12</a:t>
+            </a:fld>
+            <a:endParaRPr lang="en-US" altLang="en-US"/>
+          </a:p>
+        </p:txBody>
+      </p:sp>
+    </p:spTree>
+    <p:extLst>
+      <p:ext uri="{BB962C8B-B14F-4D97-AF65-F5344CB8AC3E}">
+        <p14:creationId xmlns:p14="http://schemas.microsoft.com/office/powerpoint/2010/main" val="3917943226"/>
+      </p:ext>
+    </p:extLst>
+  </p:cSld>
+  <p:clrMapOvr>
+    <a:masterClrMapping/>
+  </p:clrMapOvr>
+</p:notes>
+</file>
+
+<file path=ppt/notesSlides/notesSlide12.xml><?xml version="1.0" encoding="utf-8"?>
+<p:notes xmlns:a="http://schemas.openxmlformats.org/drawingml/2006/main" xmlns:r="http://schemas.openxmlformats.org/officeDocument/2006/relationships" xmlns:p="http://schemas.openxmlformats.org/presentationml/2006/main">
+  <p:cSld>
+    <p:spTree>
+      <p:nvGrpSpPr>
+        <p:cNvPr id="1" name=""/>
+        <p:cNvGrpSpPr/>
+        <p:nvPr/>
+      </p:nvGrpSpPr>
+      <p:grpSpPr>
+        <a:xfrm>
+          <a:off x="0" y="0"/>
+          <a:ext cx="0" cy="0"/>
+          <a:chOff x="0" y="0"/>
+          <a:chExt cx="0" cy="0"/>
+        </a:xfrm>
+      </p:grpSpPr>
+      <p:sp>
+        <p:nvSpPr>
+          <p:cNvPr id="2" name="Slide Image Placeholder 1"/>
+          <p:cNvSpPr>
+            <a:spLocks noGrp="1" noRot="1" noChangeAspect="1"/>
+          </p:cNvSpPr>
+          <p:nvPr>
+            <p:ph type="sldImg"/>
+          </p:nvPr>
+        </p:nvSpPr>
+        <p:spPr/>
+      </p:sp>
+      <p:sp>
+        <p:nvSpPr>
+          <p:cNvPr id="3" name="Notes Placeholder 2"/>
+          <p:cNvSpPr>
+            <a:spLocks noGrp="1"/>
+          </p:cNvSpPr>
+          <p:nvPr>
+            <p:ph type="body" idx="1"/>
+          </p:nvPr>
+        </p:nvSpPr>
+        <p:spPr/>
+        <p:txBody>
+          <a:bodyPr/>
+          <a:lstStyle/>
+          <a:p>
+            <a:pPr marL="0" marR="0" lvl="0" indent="0" algn="l" defTabSz="914400" rtl="0" eaLnBrk="0" fontAlgn="base" latinLnBrk="0" hangingPunct="0">
+              <a:lnSpc>
+                <a:spcPct val="100000"/>
+              </a:lnSpc>
+              <a:spcBef>
+                <a:spcPct val="30000"/>
+              </a:spcBef>
+              <a:spcAft>
+                <a:spcPct val="0"/>
+              </a:spcAft>
+              <a:buClrTx/>
+              <a:buSzTx/>
+              <a:buFontTx/>
+              <a:buNone/>
+              <a:tabLst/>
+              <a:defRPr/>
+            </a:pPr>
+            <a:r>
+              <a:rPr lang="en-US" b="0" dirty="0">
+                <a:solidFill>
+                  <a:srgbClr val="B5B3AA"/>
+                </a:solidFill>
+                <a:effectLst/>
+                <a:latin typeface="Consolas" panose="020B0609020204030204" pitchFamily="49" charset="0"/>
+              </a:rPr>
+              <a:t>however: since you have to write frontend (user-facing) stuff in </a:t>
+            </a:r>
+            <a:r>
+              <a:rPr lang="en-US" b="0" dirty="0" err="1">
+                <a:solidFill>
+                  <a:srgbClr val="B5B3AA"/>
+                </a:solidFill>
+                <a:effectLst/>
+                <a:latin typeface="Consolas" panose="020B0609020204030204" pitchFamily="49" charset="0"/>
+              </a:rPr>
+              <a:t>javascript</a:t>
+            </a:r>
+            <a:r>
+              <a:rPr lang="en-US" b="0" dirty="0">
+                <a:solidFill>
+                  <a:srgbClr val="B5B3AA"/>
+                </a:solidFill>
+                <a:effectLst/>
+                <a:latin typeface="Consolas" panose="020B0609020204030204" pitchFamily="49" charset="0"/>
+              </a:rPr>
+              <a:t>, many people have recently started to write their backend server stuff in </a:t>
+            </a:r>
+            <a:r>
+              <a:rPr lang="en-US" b="0" dirty="0" err="1">
+                <a:solidFill>
+                  <a:srgbClr val="B5B3AA"/>
+                </a:solidFill>
+                <a:effectLst/>
+                <a:latin typeface="Consolas" panose="020B0609020204030204" pitchFamily="49" charset="0"/>
+              </a:rPr>
+              <a:t>javascript</a:t>
+            </a:r>
+            <a:r>
+              <a:rPr lang="en-US" b="0" dirty="0">
+                <a:solidFill>
+                  <a:srgbClr val="B5B3AA"/>
+                </a:solidFill>
+                <a:effectLst/>
+                <a:latin typeface="Consolas" panose="020B0609020204030204" pitchFamily="49" charset="0"/>
+              </a:rPr>
+              <a:t> as well, to avoid having to learn more than one language. they can do this because a program called node.js will run </a:t>
+            </a:r>
+            <a:r>
+              <a:rPr lang="en-US" b="0" dirty="0" err="1">
+                <a:solidFill>
+                  <a:srgbClr val="B5B3AA"/>
+                </a:solidFill>
+                <a:effectLst/>
+                <a:latin typeface="Consolas" panose="020B0609020204030204" pitchFamily="49" charset="0"/>
+              </a:rPr>
+              <a:t>javascript</a:t>
+            </a:r>
+            <a:r>
+              <a:rPr lang="en-US" b="0" dirty="0">
+                <a:solidFill>
+                  <a:srgbClr val="B5B3AA"/>
+                </a:solidFill>
+                <a:effectLst/>
+                <a:latin typeface="Consolas" panose="020B0609020204030204" pitchFamily="49" charset="0"/>
+              </a:rPr>
+              <a:t> code for you, outside of its original habitat (the browser.) node could theoretically run any kind of program, but it's mostly used for web servers. there's a very popular library for it called "express" that provides convenience functions that make common web server tasks very easy to accomplish. and this introduction is finally over; we can now try creating our own node.js with express server. was that nine hours?</a:t>
+            </a:r>
+            <a:endParaRPr lang="en-US" b="0" dirty="0">
+              <a:solidFill>
+                <a:srgbClr val="DDDDDD"/>
+              </a:solidFill>
+              <a:effectLst/>
+              <a:latin typeface="Consolas" panose="020B0609020204030204" pitchFamily="49" charset="0"/>
+            </a:endParaRPr>
+          </a:p>
+        </p:txBody>
+      </p:sp>
+      <p:sp>
+        <p:nvSpPr>
+          <p:cNvPr id="4" name="Slide Number Placeholder 3"/>
+          <p:cNvSpPr>
+            <a:spLocks noGrp="1"/>
+          </p:cNvSpPr>
+          <p:nvPr>
+            <p:ph type="sldNum" sz="quarter" idx="5"/>
+          </p:nvPr>
+        </p:nvSpPr>
+        <p:spPr/>
+        <p:txBody>
+          <a:bodyPr/>
+          <a:lstStyle/>
+          <a:p>
+            <a:fld id="{02DFA6AD-67CC-4248-91A0-32DAE947B1E4}" type="slidenum">
+              <a:rPr lang="en-US" altLang="en-US" smtClean="0"/>
+              <a:pPr/>
+              <a:t>13</a:t>
+            </a:fld>
+            <a:endParaRPr lang="en-US" altLang="en-US"/>
+          </a:p>
+        </p:txBody>
+      </p:sp>
+    </p:spTree>
+    <p:extLst>
+      <p:ext uri="{BB962C8B-B14F-4D97-AF65-F5344CB8AC3E}">
+        <p14:creationId xmlns:p14="http://schemas.microsoft.com/office/powerpoint/2010/main" val="1114752169"/>
+      </p:ext>
+    </p:extLst>
+  </p:cSld>
+  <p:clrMapOvr>
+    <a:masterClrMapping/>
+  </p:clrMapOvr>
+</p:notes>
+</file>
+
 <file path=ppt/notesSlides/notesSlide2.xml><?xml version="1.0" encoding="utf-8"?>
 <p:notes xmlns:a="http://schemas.openxmlformats.org/drawingml/2006/main" xmlns:r="http://schemas.openxmlformats.org/officeDocument/2006/relationships" xmlns:p="http://schemas.openxmlformats.org/presentationml/2006/main">
   <p:cSld>
@@ -1417,6 +1847,10 @@
               <a:defRPr/>
             </a:pPr>
             <a:r>
+              <a:rPr lang="en-US" dirty="0"/>
+              <a:t>or sometimes it’s called “sandboxed,” inside your browser. [] </a:t>
+            </a:r>
+            <a:r>
               <a:rPr lang="en-US" b="0" dirty="0">
                 <a:solidFill>
                   <a:srgbClr val="B5B3AA"/>
@@ -1557,23 +1991,6 @@
           <a:bodyPr/>
           <a:lstStyle/>
           <a:p>
-            <a:pPr marL="0" marR="0" lvl="0" indent="0" algn="l" defTabSz="914400" rtl="0" eaLnBrk="0" fontAlgn="base" latinLnBrk="0" hangingPunct="0">
-              <a:lnSpc>
-                <a:spcPct val="100000"/>
-              </a:lnSpc>
-              <a:spcBef>
-                <a:spcPct val="30000"/>
-              </a:spcBef>
-              <a:spcAft>
-                <a:spcPct val="0"/>
-              </a:spcAft>
-              <a:buClrTx/>
-              <a:buSzTx/>
-              <a:buFontTx/>
-              <a:buNone/>
-              <a:tabLst/>
-              <a:defRPr/>
-            </a:pPr>
             <a:r>
               <a:rPr lang="en-US" b="0" dirty="0">
                 <a:solidFill>
@@ -1582,34 +1999,29 @@
                 <a:effectLst/>
                 <a:latin typeface="Consolas" panose="020B0609020204030204" pitchFamily="49" charset="0"/>
               </a:rPr>
-              <a:t>and c), the data won't be there if the user visits the website with a different browser, like the one on their phone, or if any other user visits the website and wants to see what other people are doing on there. this is why the programs that are responsible for web pages kind of need to be split in half: we need to run half of the program in the user's browser, to respond to stuff they're doing, and half of it on some external computer that stores data and lets you retrieve it from anywhere. that kind of computer is called a web server.</a:t>
-            </a:r>
-          </a:p>
-          <a:p>
-            <a:pPr marL="0" marR="0" lvl="0" indent="0" algn="l" defTabSz="914400" rtl="0" eaLnBrk="0" fontAlgn="base" latinLnBrk="0" hangingPunct="0">
-              <a:lnSpc>
-                <a:spcPct val="100000"/>
-              </a:lnSpc>
-              <a:spcBef>
-                <a:spcPct val="30000"/>
-              </a:spcBef>
-              <a:spcAft>
-                <a:spcPct val="0"/>
-              </a:spcAft>
-              <a:buClrTx/>
-              <a:buSzTx/>
-              <a:buFontTx/>
-              <a:buNone/>
-              <a:tabLst/>
-              <a:defRPr/>
-            </a:pPr>
-            <a:endParaRPr lang="en-US" b="0" dirty="0">
-              <a:solidFill>
-                <a:srgbClr val="DDDDDD"/>
-              </a:solidFill>
-              <a:effectLst/>
-              <a:latin typeface="Consolas" panose="020B0609020204030204" pitchFamily="49" charset="0"/>
-            </a:endParaRPr>
+              <a:t>and sell it to the north </a:t>
+            </a:r>
+            <a:r>
+              <a:rPr lang="en-US" b="0" dirty="0" err="1">
+                <a:solidFill>
+                  <a:srgbClr val="B5B3AA"/>
+                </a:solidFill>
+                <a:effectLst/>
+                <a:latin typeface="Consolas" panose="020B0609020204030204" pitchFamily="49" charset="0"/>
+              </a:rPr>
+              <a:t>korean</a:t>
+            </a:r>
+            <a:r>
+              <a:rPr lang="en-US" b="0" dirty="0">
+                <a:solidFill>
+                  <a:srgbClr val="B5B3AA"/>
+                </a:solidFill>
+                <a:effectLst/>
+                <a:latin typeface="Consolas" panose="020B0609020204030204" pitchFamily="49" charset="0"/>
+              </a:rPr>
+              <a:t> state; [] [next slide]</a:t>
+            </a:r>
+            <a:endParaRPr lang="en-US" dirty="0"/>
           </a:p>
         </p:txBody>
       </p:sp>
@@ -1631,7 +2043,7 @@
             <a:fld id="{02DFA6AD-67CC-4248-91A0-32DAE947B1E4}" type="slidenum">
               <a:rPr lang="en-US" altLang="en-US" smtClean="0"/>
               <a:pPr/>
-              <a:t>6</a:t>
+              <a:t>5</a:t>
             </a:fld>
             <a:endParaRPr lang="en-US" altLang="en-US"/>
           </a:p>
@@ -1640,7 +2052,7 @@
     </p:spTree>
     <p:extLst>
       <p:ext uri="{BB962C8B-B14F-4D97-AF65-F5344CB8AC3E}">
-        <p14:creationId xmlns:p14="http://schemas.microsoft.com/office/powerpoint/2010/main" val="331195847"/>
+        <p14:creationId xmlns:p14="http://schemas.microsoft.com/office/powerpoint/2010/main" val="2913958437"/>
       </p:ext>
     </p:extLst>
   </p:cSld>
@@ -1719,28 +2131,34 @@
                 <a:effectLst/>
                 <a:latin typeface="Consolas" panose="020B0609020204030204" pitchFamily="49" charset="0"/>
               </a:rPr>
-              <a:t>a server is just a device that provides resources to a network. every time you view any kind of website, a web server is sending you the html, </a:t>
-            </a:r>
-            <a:r>
-              <a:rPr lang="en-US" b="0" dirty="0" err="1">
-                <a:solidFill>
-                  <a:srgbClr val="B5B3AA"/>
-                </a:solidFill>
-                <a:effectLst/>
-                <a:latin typeface="Consolas" panose="020B0609020204030204" pitchFamily="49" charset="0"/>
-              </a:rPr>
-              <a:t>javascript</a:t>
-            </a:r>
-            <a:r>
-              <a:rPr lang="en-US" b="0" dirty="0">
-                <a:solidFill>
-                  <a:srgbClr val="B5B3AA"/>
-                </a:solidFill>
-                <a:effectLst/>
-                <a:latin typeface="Consolas" panose="020B0609020204030204" pitchFamily="49" charset="0"/>
-              </a:rPr>
-              <a:t>, images, and et cetera that constitute the page you're looking at, including any data that’s submitted by users or that needs to be able to change over time.</a:t>
-            </a:r>
+              <a:t>and c), the data won't be there if the user visits the website with a different browser, like the one on their phone, or if any other user visits the website and wants to see what other people are doing on there. this is why the programs that are responsible for web pages kind of need to be split in half: we need to run half of the program in the user's browser, to respond to stuff they're doing, and half of it on some external computer that stores data and lets you retrieve it from anywhere. that kind of computer is called a web server.</a:t>
+            </a:r>
+          </a:p>
+          <a:p>
+            <a:pPr marL="0" marR="0" lvl="0" indent="0" algn="l" defTabSz="914400" rtl="0" eaLnBrk="0" fontAlgn="base" latinLnBrk="0" hangingPunct="0">
+              <a:lnSpc>
+                <a:spcPct val="100000"/>
+              </a:lnSpc>
+              <a:spcBef>
+                <a:spcPct val="30000"/>
+              </a:spcBef>
+              <a:spcAft>
+                <a:spcPct val="0"/>
+              </a:spcAft>
+              <a:buClrTx/>
+              <a:buSzTx/>
+              <a:buFontTx/>
+              <a:buNone/>
+              <a:tabLst/>
+              <a:defRPr/>
+            </a:pPr>
+            <a:endParaRPr lang="en-US" b="0" dirty="0">
+              <a:solidFill>
+                <a:srgbClr val="DDDDDD"/>
+              </a:solidFill>
+              <a:effectLst/>
+              <a:latin typeface="Consolas" panose="020B0609020204030204" pitchFamily="49" charset="0"/>
+            </a:endParaRPr>
           </a:p>
         </p:txBody>
       </p:sp>
@@ -1762,7 +2180,7 @@
             <a:fld id="{02DFA6AD-67CC-4248-91A0-32DAE947B1E4}" type="slidenum">
               <a:rPr lang="en-US" altLang="en-US" smtClean="0"/>
               <a:pPr/>
-              <a:t>7</a:t>
+              <a:t>6</a:t>
             </a:fld>
             <a:endParaRPr lang="en-US" altLang="en-US"/>
           </a:p>
@@ -1771,7 +2189,7 @@
     </p:spTree>
     <p:extLst>
       <p:ext uri="{BB962C8B-B14F-4D97-AF65-F5344CB8AC3E}">
-        <p14:creationId xmlns:p14="http://schemas.microsoft.com/office/powerpoint/2010/main" val="1651816249"/>
+        <p14:creationId xmlns:p14="http://schemas.microsoft.com/office/powerpoint/2010/main" val="331195847"/>
       </p:ext>
     </p:extLst>
   </p:cSld>
@@ -1850,15 +2268,28 @@
                 <a:effectLst/>
                 <a:latin typeface="Consolas" panose="020B0609020204030204" pitchFamily="49" charset="0"/>
               </a:rPr>
-              <a:t>any network device can play the role of a server: a phone can, a desktop computer can, a raspberry pi can; you usually want a server to be a big powerful computer with a good internet connection sitting in a cool basement somewhere, but sometimes you have to work with what you got, and so you're forced to jailbreak and reverse engineer your smart toaster</a:t>
-            </a:r>
-            <a:endParaRPr lang="en-US" b="0" dirty="0">
-              <a:solidFill>
-                <a:srgbClr val="DDDDDD"/>
-              </a:solidFill>
-              <a:effectLst/>
-              <a:latin typeface="Consolas" panose="020B0609020204030204" pitchFamily="49" charset="0"/>
-            </a:endParaRPr>
+              <a:t>a server is just a device that provides resources to a network. every time you view any kind of website, a web server is sending you the html, </a:t>
+            </a:r>
+            <a:r>
+              <a:rPr lang="en-US" b="0" dirty="0" err="1">
+                <a:solidFill>
+                  <a:srgbClr val="B5B3AA"/>
+                </a:solidFill>
+                <a:effectLst/>
+                <a:latin typeface="Consolas" panose="020B0609020204030204" pitchFamily="49" charset="0"/>
+              </a:rPr>
+              <a:t>javascript</a:t>
+            </a:r>
+            <a:r>
+              <a:rPr lang="en-US" b="0" dirty="0">
+                <a:solidFill>
+                  <a:srgbClr val="B5B3AA"/>
+                </a:solidFill>
+                <a:effectLst/>
+                <a:latin typeface="Consolas" panose="020B0609020204030204" pitchFamily="49" charset="0"/>
+              </a:rPr>
+              <a:t>, images, and et cetera that constitute the page you're looking at, including any data that’s submitted by users or that needs to be able to change over time.</a:t>
+            </a:r>
           </a:p>
         </p:txBody>
       </p:sp>
@@ -1880,7 +2311,7 @@
             <a:fld id="{02DFA6AD-67CC-4248-91A0-32DAE947B1E4}" type="slidenum">
               <a:rPr lang="en-US" altLang="en-US" smtClean="0"/>
               <a:pPr/>
-              <a:t>8</a:t>
+              <a:t>7</a:t>
             </a:fld>
             <a:endParaRPr lang="en-US" altLang="en-US"/>
           </a:p>
@@ -1889,7 +2320,7 @@
     </p:spTree>
     <p:extLst>
       <p:ext uri="{BB962C8B-B14F-4D97-AF65-F5344CB8AC3E}">
-        <p14:creationId xmlns:p14="http://schemas.microsoft.com/office/powerpoint/2010/main" val="2624505311"/>
+        <p14:creationId xmlns:p14="http://schemas.microsoft.com/office/powerpoint/2010/main" val="1651816249"/>
       </p:ext>
     </p:extLst>
   </p:cSld>
@@ -1943,6 +2374,23 @@
           <a:bodyPr/>
           <a:lstStyle/>
           <a:p>
+            <a:pPr marL="0" marR="0" lvl="0" indent="0" algn="l" defTabSz="914400" rtl="0" eaLnBrk="0" fontAlgn="base" latinLnBrk="0" hangingPunct="0">
+              <a:lnSpc>
+                <a:spcPct val="100000"/>
+              </a:lnSpc>
+              <a:spcBef>
+                <a:spcPct val="30000"/>
+              </a:spcBef>
+              <a:spcAft>
+                <a:spcPct val="0"/>
+              </a:spcAft>
+              <a:buClrTx/>
+              <a:buSzTx/>
+              <a:buFontTx/>
+              <a:buNone/>
+              <a:tabLst/>
+              <a:defRPr/>
+            </a:pPr>
             <a:r>
               <a:rPr lang="en-US" b="0" dirty="0">
                 <a:solidFill>
@@ -1951,7 +2399,7 @@
                 <a:effectLst/>
                 <a:latin typeface="Consolas" panose="020B0609020204030204" pitchFamily="49" charset="0"/>
               </a:rPr>
-              <a:t>and unfortunately, the term "server" can refer to either a whole computer or just a specific program that is implementing the role of providing resources on a network. so that may sometimes be confusing, sorry. but hopefully it will be possible to use context to figure out what kind of thing i'm talking about.</a:t>
+              <a:t>any network device can play the role of a server: a phone can, a desktop computer can, a raspberry pi can; you usually want a server to be a big powerful computer with a good internet connection sitting in a cool basement somewhere, but sometimes you have to work with what you got, and so you're forced to jailbreak and reverse engineer your smart toaster</a:t>
             </a:r>
             <a:endParaRPr lang="en-US" b="0" dirty="0">
               <a:solidFill>
@@ -1981,7 +2429,7 @@
             <a:fld id="{02DFA6AD-67CC-4248-91A0-32DAE947B1E4}" type="slidenum">
               <a:rPr lang="en-US" altLang="en-US" smtClean="0"/>
               <a:pPr/>
-              <a:t>9</a:t>
+              <a:t>8</a:t>
             </a:fld>
             <a:endParaRPr lang="en-US" altLang="en-US"/>
           </a:p>
@@ -1990,7 +2438,7 @@
     </p:spTree>
     <p:extLst>
       <p:ext uri="{BB962C8B-B14F-4D97-AF65-F5344CB8AC3E}">
-        <p14:creationId xmlns:p14="http://schemas.microsoft.com/office/powerpoint/2010/main" val="1165841184"/>
+        <p14:creationId xmlns:p14="http://schemas.microsoft.com/office/powerpoint/2010/main" val="2624505311"/>
       </p:ext>
     </p:extLst>
   </p:cSld>
@@ -2052,67 +2500,7 @@
                 <a:effectLst/>
                 <a:latin typeface="Consolas" panose="020B0609020204030204" pitchFamily="49" charset="0"/>
               </a:rPr>
-              <a:t>and, by the way, there is no agreement on the best way to run a server. when you’re just creating the content that the users see, which is called frontend web development, there really aren’t too many options: you have to produce html, </a:t>
-            </a:r>
-            <a:r>
-              <a:rPr lang="en-US" b="0" dirty="0" err="1">
-                <a:solidFill>
-                  <a:srgbClr val="B5B3AA"/>
-                </a:solidFill>
-                <a:effectLst/>
-                <a:latin typeface="Consolas" panose="020B0609020204030204" pitchFamily="49" charset="0"/>
-              </a:rPr>
-              <a:t>css</a:t>
-            </a:r>
-            <a:r>
-              <a:rPr lang="en-US" b="0" dirty="0">
-                <a:solidFill>
-                  <a:srgbClr val="B5B3AA"/>
-                </a:solidFill>
-                <a:effectLst/>
-                <a:latin typeface="Consolas" panose="020B0609020204030204" pitchFamily="49" charset="0"/>
-              </a:rPr>
-              <a:t>, and </a:t>
-            </a:r>
-            <a:r>
-              <a:rPr lang="en-US" b="0" dirty="0" err="1">
-                <a:solidFill>
-                  <a:srgbClr val="B5B3AA"/>
-                </a:solidFill>
-                <a:effectLst/>
-                <a:latin typeface="Consolas" panose="020B0609020204030204" pitchFamily="49" charset="0"/>
-              </a:rPr>
-              <a:t>javascript</a:t>
-            </a:r>
-            <a:r>
-              <a:rPr lang="en-US" b="0" dirty="0">
-                <a:solidFill>
-                  <a:srgbClr val="B5B3AA"/>
-                </a:solidFill>
-                <a:effectLst/>
-                <a:latin typeface="Consolas" panose="020B0609020204030204" pitchFamily="49" charset="0"/>
-              </a:rPr>
-              <a:t>, and the main ways to do that are to write programs with react, </a:t>
-            </a:r>
-            <a:r>
-              <a:rPr lang="en-US" b="0" dirty="0" err="1">
-                <a:solidFill>
-                  <a:srgbClr val="B5B3AA"/>
-                </a:solidFill>
-                <a:effectLst/>
-                <a:latin typeface="Consolas" panose="020B0609020204030204" pitchFamily="49" charset="0"/>
-              </a:rPr>
-              <a:t>vue</a:t>
-            </a:r>
-            <a:r>
-              <a:rPr lang="en-US" b="0" dirty="0">
-                <a:solidFill>
-                  <a:srgbClr val="B5B3AA"/>
-                </a:solidFill>
-                <a:effectLst/>
-                <a:latin typeface="Consolas" panose="020B0609020204030204" pitchFamily="49" charset="0"/>
-              </a:rPr>
-              <a:t>, or angular; frontend web designers do not use too many brain cells pinning down their basic tools. but if you're creating a server, which means you're doing what's called backend engineering, you can do anything. you can write your code in any language, using any or multiple of a million frameworks and libraries people have created for you, you can read and write to files, you can integrate with databases, you can run other unrelated programs from inside your program, anything. we're staring into the abyss, here. we're not trapped in the browser anymore, but we are caught in the prison of having decisions to make.</a:t>
+              <a:t>and unfortunately, the term "server" can refer to either a whole computer or just a specific program that is implementing the role of providing resources on a network. so that may sometimes be confusing, sorry. but hopefully it will be possible to use context to figure out what kind of thing i'm talking about.</a:t>
             </a:r>
             <a:endParaRPr lang="en-US" b="0" dirty="0">
               <a:solidFill>
@@ -2142,7 +2530,7 @@
             <a:fld id="{02DFA6AD-67CC-4248-91A0-32DAE947B1E4}" type="slidenum">
               <a:rPr lang="en-US" altLang="en-US" smtClean="0"/>
               <a:pPr/>
-              <a:t>10</a:t>
+              <a:t>9</a:t>
             </a:fld>
             <a:endParaRPr lang="en-US" altLang="en-US"/>
           </a:p>
@@ -2151,7 +2539,7 @@
     </p:spTree>
     <p:extLst>
       <p:ext uri="{BB962C8B-B14F-4D97-AF65-F5344CB8AC3E}">
-        <p14:creationId xmlns:p14="http://schemas.microsoft.com/office/powerpoint/2010/main" val="1159978168"/>
+        <p14:creationId xmlns:p14="http://schemas.microsoft.com/office/powerpoint/2010/main" val="1165841184"/>
       </p:ext>
     </p:extLst>
   </p:cSld>
@@ -2205,23 +2593,6 @@
           <a:bodyPr/>
           <a:lstStyle/>
           <a:p>
-            <a:pPr marL="0" marR="0" lvl="0" indent="0" algn="l" defTabSz="914400" rtl="0" eaLnBrk="0" fontAlgn="base" latinLnBrk="0" hangingPunct="0">
-              <a:lnSpc>
-                <a:spcPct val="100000"/>
-              </a:lnSpc>
-              <a:spcBef>
-                <a:spcPct val="30000"/>
-              </a:spcBef>
-              <a:spcAft>
-                <a:spcPct val="0"/>
-              </a:spcAft>
-              <a:buClrTx/>
-              <a:buSzTx/>
-              <a:buFontTx/>
-              <a:buNone/>
-              <a:tabLst/>
-              <a:defRPr/>
-            </a:pPr>
             <a:r>
               <a:rPr lang="en-US" b="0" dirty="0">
                 <a:solidFill>
@@ -2230,7 +2601,27 @@
                 <a:effectLst/>
                 <a:latin typeface="Consolas" panose="020B0609020204030204" pitchFamily="49" charset="0"/>
               </a:rPr>
-              <a:t>however: since you have to write frontend (user-facing) stuff in </a:t>
+              <a:t>and, by the way, there is no agreement on the best way to run a server. when you’re just creating the content that the users see, which is called frontend web development, there really aren’t too many options: you have to produce html, </a:t>
+            </a:r>
+            <a:r>
+              <a:rPr lang="en-US" b="0" dirty="0" err="1">
+                <a:solidFill>
+                  <a:srgbClr val="B5B3AA"/>
+                </a:solidFill>
+                <a:effectLst/>
+                <a:latin typeface="Consolas" panose="020B0609020204030204" pitchFamily="49" charset="0"/>
+              </a:rPr>
+              <a:t>css</a:t>
+            </a:r>
+            <a:r>
+              <a:rPr lang="en-US" b="0" dirty="0">
+                <a:solidFill>
+                  <a:srgbClr val="B5B3AA"/>
+                </a:solidFill>
+                <a:effectLst/>
+                <a:latin typeface="Consolas" panose="020B0609020204030204" pitchFamily="49" charset="0"/>
+              </a:rPr>
+              <a:t>, and </a:t>
             </a:r>
             <a:r>
               <a:rPr lang="en-US" b="0" dirty="0" err="1">
@@ -2250,7 +2641,7 @@
                 <a:effectLst/>
                 <a:latin typeface="Consolas" panose="020B0609020204030204" pitchFamily="49" charset="0"/>
               </a:rPr>
-              <a:t>, many people have recently started to write their backend server stuff in </a:t>
+              <a:t>, and the main ways to do that are to write programs with react, </a:t>
             </a:r>
             <a:r>
               <a:rPr lang="en-US" b="0" dirty="0" err="1">
@@ -2260,7 +2651,7 @@
                 <a:effectLst/>
                 <a:latin typeface="Consolas" panose="020B0609020204030204" pitchFamily="49" charset="0"/>
               </a:rPr>
-              <a:t>javascript</a:t>
+              <a:t>vue</a:t>
             </a:r>
             <a:r>
               <a:rPr lang="en-US" b="0" dirty="0">
@@ -2270,27 +2661,7 @@
                 <a:effectLst/>
                 <a:latin typeface="Consolas" panose="020B0609020204030204" pitchFamily="49" charset="0"/>
               </a:rPr>
-              <a:t> as well, to avoid having to learn more than one language. they can do this because a program called node.js will run </a:t>
-            </a:r>
-            <a:r>
-              <a:rPr lang="en-US" b="0" dirty="0" err="1">
-                <a:solidFill>
-                  <a:srgbClr val="B5B3AA"/>
-                </a:solidFill>
-                <a:effectLst/>
-                <a:latin typeface="Consolas" panose="020B0609020204030204" pitchFamily="49" charset="0"/>
-              </a:rPr>
-              <a:t>javascript</a:t>
-            </a:r>
-            <a:r>
-              <a:rPr lang="en-US" b="0" dirty="0">
-                <a:solidFill>
-                  <a:srgbClr val="B5B3AA"/>
-                </a:solidFill>
-                <a:effectLst/>
-                <a:latin typeface="Consolas" panose="020B0609020204030204" pitchFamily="49" charset="0"/>
-              </a:rPr>
-              <a:t> code for you, outside of its original habitat (the browser.) node could theoretically run any kind of program, but it's mostly used for web servers. there's a very popular library for it called "express" that provides convenience functions that make common web server tasks very easy to accomplish. and this introduction is finally over; we can now try creating our own node.js with express server. was that nine hours?</a:t>
+              <a:t>, or angular; frontend web designers [next slide] do not use too many brain cells pinning down their basic tools. </a:t>
             </a:r>
             <a:endParaRPr lang="en-US" b="0" dirty="0">
               <a:solidFill>
@@ -2320,7 +2691,7 @@
             <a:fld id="{02DFA6AD-67CC-4248-91A0-32DAE947B1E4}" type="slidenum">
               <a:rPr lang="en-US" altLang="en-US" smtClean="0"/>
               <a:pPr/>
-              <a:t>11</a:t>
+              <a:t>10</a:t>
             </a:fld>
             <a:endParaRPr lang="en-US" altLang="en-US"/>
           </a:p>
@@ -2329,7 +2700,7 @@
     </p:spTree>
     <p:extLst>
       <p:ext uri="{BB962C8B-B14F-4D97-AF65-F5344CB8AC3E}">
-        <p14:creationId xmlns:p14="http://schemas.microsoft.com/office/powerpoint/2010/main" val="1114752169"/>
+        <p14:creationId xmlns:p14="http://schemas.microsoft.com/office/powerpoint/2010/main" val="1159978168"/>
       </p:ext>
     </p:extLst>
   </p:cSld>
@@ -7648,7 +8019,7 @@
           <a:p>
             <a:r>
               <a:rPr lang="en-US" altLang="en-US" dirty="0"/>
-              <a:t>Andrew Just Talks for Nine Hours About Nothing</a:t>
+              <a:t>Andrew Just Talks for Nine Hours About Express.js</a:t>
             </a:r>
           </a:p>
         </p:txBody>
@@ -7848,6 +8219,266 @@
 </file>
 
 <file path=ppt/slides/slide11.xml><?xml version="1.0" encoding="utf-8"?>
+<p:sld xmlns:a="http://schemas.openxmlformats.org/drawingml/2006/main" xmlns:r="http://schemas.openxmlformats.org/officeDocument/2006/relationships" xmlns:p="http://schemas.openxmlformats.org/presentationml/2006/main">
+  <p:cSld>
+    <p:spTree>
+      <p:nvGrpSpPr>
+        <p:cNvPr id="1" name="">
+          <a:extLst>
+            <a:ext uri="{FF2B5EF4-FFF2-40B4-BE49-F238E27FC236}">
+              <a16:creationId xmlns:a16="http://schemas.microsoft.com/office/drawing/2014/main" id="{D61AD219-273A-0A61-ADBD-1CC009B30DCC}"/>
+            </a:ext>
+          </a:extLst>
+        </p:cNvPr>
+        <p:cNvGrpSpPr/>
+        <p:nvPr/>
+      </p:nvGrpSpPr>
+      <p:grpSpPr>
+        <a:xfrm>
+          <a:off x="0" y="0"/>
+          <a:ext cx="0" cy="0"/>
+          <a:chOff x="0" y="0"/>
+          <a:chExt cx="0" cy="0"/>
+        </a:xfrm>
+      </p:grpSpPr>
+      <p:pic>
+        <p:nvPicPr>
+          <p:cNvPr id="3074" name="Picture 2" descr="67 | Teh Meme Wiki | Fandom">
+            <a:extLst>
+              <a:ext uri="{FF2B5EF4-FFF2-40B4-BE49-F238E27FC236}">
+                <a16:creationId xmlns:a16="http://schemas.microsoft.com/office/drawing/2014/main" id="{DB82C4BC-C691-DD85-82D2-B4E92280A850}"/>
+              </a:ext>
+            </a:extLst>
+          </p:cNvPr>
+          <p:cNvPicPr>
+            <a:picLocks noChangeAspect="1" noChangeArrowheads="1"/>
+          </p:cNvPicPr>
+          <p:nvPr/>
+        </p:nvPicPr>
+        <p:blipFill>
+          <a:blip r:embed="rId3">
+            <a:extLst>
+              <a:ext uri="{28A0092B-C50C-407E-A947-70E740481C1C}">
+                <a14:useLocalDpi xmlns:a14="http://schemas.microsoft.com/office/drawing/2010/main" val="0"/>
+              </a:ext>
+            </a:extLst>
+          </a:blip>
+          <a:srcRect/>
+          <a:stretch>
+            <a:fillRect/>
+          </a:stretch>
+        </p:blipFill>
+        <p:spPr bwMode="auto">
+          <a:xfrm>
+            <a:off x="152400" y="1727200"/>
+            <a:ext cx="8780266" cy="4196080"/>
+          </a:xfrm>
+          <a:prstGeom prst="rect">
+            <a:avLst/>
+          </a:prstGeom>
+          <a:noFill/>
+          <a:extLst>
+            <a:ext uri="{909E8E84-426E-40DD-AFC4-6F175D3DCCD1}">
+              <a14:hiddenFill xmlns:a14="http://schemas.microsoft.com/office/drawing/2010/main">
+                <a:solidFill>
+                  <a:srgbClr val="FFFFFF"/>
+                </a:solidFill>
+              </a14:hiddenFill>
+            </a:ext>
+          </a:extLst>
+        </p:spPr>
+      </p:pic>
+      <p:pic>
+        <p:nvPicPr>
+          <p:cNvPr id="3076" name="Picture 4" descr="Kendrick Lamar Stare (Analog Horror Face) | Mustard Analog Horror | Know  Your Meme">
+            <a:extLst>
+              <a:ext uri="{FF2B5EF4-FFF2-40B4-BE49-F238E27FC236}">
+                <a16:creationId xmlns:a16="http://schemas.microsoft.com/office/drawing/2014/main" id="{15F8EAA9-41EE-A7CF-DC7F-06EDE36501B6}"/>
+              </a:ext>
+            </a:extLst>
+          </p:cNvPr>
+          <p:cNvPicPr>
+            <a:picLocks noChangeAspect="1" noChangeArrowheads="1"/>
+          </p:cNvPicPr>
+          <p:nvPr/>
+        </p:nvPicPr>
+        <p:blipFill>
+          <a:blip r:embed="rId4">
+            <a:extLst>
+              <a:ext uri="{28A0092B-C50C-407E-A947-70E740481C1C}">
+                <a14:useLocalDpi xmlns:a14="http://schemas.microsoft.com/office/drawing/2010/main" val="0"/>
+              </a:ext>
+            </a:extLst>
+          </a:blip>
+          <a:srcRect/>
+          <a:stretch>
+            <a:fillRect/>
+          </a:stretch>
+        </p:blipFill>
+        <p:spPr bwMode="auto">
+          <a:xfrm>
+            <a:off x="157759" y="6372839"/>
+            <a:ext cx="359093" cy="407374"/>
+          </a:xfrm>
+          <a:prstGeom prst="rect">
+            <a:avLst/>
+          </a:prstGeom>
+          <a:noFill/>
+          <a:extLst>
+            <a:ext uri="{909E8E84-426E-40DD-AFC4-6F175D3DCCD1}">
+              <a14:hiddenFill xmlns:a14="http://schemas.microsoft.com/office/drawing/2010/main">
+                <a:solidFill>
+                  <a:srgbClr val="FFFFFF"/>
+                </a:solidFill>
+              </a14:hiddenFill>
+            </a:ext>
+          </a:extLst>
+        </p:spPr>
+      </p:pic>
+    </p:spTree>
+    <p:extLst>
+      <p:ext uri="{BB962C8B-B14F-4D97-AF65-F5344CB8AC3E}">
+        <p14:creationId xmlns:p14="http://schemas.microsoft.com/office/powerpoint/2010/main" val="3957075540"/>
+      </p:ext>
+    </p:extLst>
+  </p:cSld>
+  <p:clrMapOvr>
+    <a:masterClrMapping/>
+  </p:clrMapOvr>
+</p:sld>
+</file>
+
+<file path=ppt/slides/slide12.xml><?xml version="1.0" encoding="utf-8"?>
+<p:sld xmlns:a="http://schemas.openxmlformats.org/drawingml/2006/main" xmlns:r="http://schemas.openxmlformats.org/officeDocument/2006/relationships" xmlns:p="http://schemas.openxmlformats.org/presentationml/2006/main">
+  <p:cSld>
+    <p:spTree>
+      <p:nvGrpSpPr>
+        <p:cNvPr id="1" name="">
+          <a:extLst>
+            <a:ext uri="{FF2B5EF4-FFF2-40B4-BE49-F238E27FC236}">
+              <a16:creationId xmlns:a16="http://schemas.microsoft.com/office/drawing/2014/main" id="{8883F516-5220-278D-CE54-DA424EAEE753}"/>
+            </a:ext>
+          </a:extLst>
+        </p:cNvPr>
+        <p:cNvGrpSpPr/>
+        <p:nvPr/>
+      </p:nvGrpSpPr>
+      <p:grpSpPr>
+        <a:xfrm>
+          <a:off x="0" y="0"/>
+          <a:ext cx="0" cy="0"/>
+          <a:chOff x="0" y="0"/>
+          <a:chExt cx="0" cy="0"/>
+        </a:xfrm>
+      </p:grpSpPr>
+      <p:pic>
+        <p:nvPicPr>
+          <p:cNvPr id="1026" name="Picture 2" descr="Cats with a few Brain Cells - YouTube">
+            <a:extLst>
+              <a:ext uri="{FF2B5EF4-FFF2-40B4-BE49-F238E27FC236}">
+                <a16:creationId xmlns:a16="http://schemas.microsoft.com/office/drawing/2014/main" id="{134DAA45-604C-D1EF-282C-C8DECB62475D}"/>
+              </a:ext>
+            </a:extLst>
+          </p:cNvPr>
+          <p:cNvPicPr>
+            <a:picLocks noChangeAspect="1" noChangeArrowheads="1"/>
+          </p:cNvPicPr>
+          <p:nvPr/>
+        </p:nvPicPr>
+        <p:blipFill>
+          <a:blip r:embed="rId3">
+            <a:extLst>
+              <a:ext uri="{28A0092B-C50C-407E-A947-70E740481C1C}">
+                <a14:useLocalDpi xmlns:a14="http://schemas.microsoft.com/office/drawing/2010/main" val="0"/>
+              </a:ext>
+            </a:extLst>
+          </a:blip>
+          <a:srcRect/>
+          <a:stretch>
+            <a:fillRect/>
+          </a:stretch>
+        </p:blipFill>
+        <p:spPr bwMode="auto">
+          <a:xfrm>
+            <a:off x="152400" y="1727200"/>
+            <a:ext cx="8780266" cy="4196080"/>
+          </a:xfrm>
+          <a:prstGeom prst="rect">
+            <a:avLst/>
+          </a:prstGeom>
+          <a:noFill/>
+          <a:extLst>
+            <a:ext uri="{909E8E84-426E-40DD-AFC4-6F175D3DCCD1}">
+              <a14:hiddenFill xmlns:a14="http://schemas.microsoft.com/office/drawing/2010/main">
+                <a:solidFill>
+                  <a:srgbClr val="FFFFFF"/>
+                </a:solidFill>
+              </a14:hiddenFill>
+            </a:ext>
+          </a:extLst>
+        </p:spPr>
+      </p:pic>
+      <p:pic>
+        <p:nvPicPr>
+          <p:cNvPr id="2050" name="Picture 2" descr="Bob the Builder (character) - Wikipedia">
+            <a:extLst>
+              <a:ext uri="{FF2B5EF4-FFF2-40B4-BE49-F238E27FC236}">
+                <a16:creationId xmlns:a16="http://schemas.microsoft.com/office/drawing/2014/main" id="{6F5B3052-5AAA-CA94-0E6B-452079D1DE97}"/>
+              </a:ext>
+            </a:extLst>
+          </p:cNvPr>
+          <p:cNvPicPr>
+            <a:picLocks noChangeAspect="1" noChangeArrowheads="1"/>
+          </p:cNvPicPr>
+          <p:nvPr/>
+        </p:nvPicPr>
+        <p:blipFill>
+          <a:blip r:embed="rId4">
+            <a:extLst>
+              <a:ext uri="{28A0092B-C50C-407E-A947-70E740481C1C}">
+                <a14:useLocalDpi xmlns:a14="http://schemas.microsoft.com/office/drawing/2010/main" val="0"/>
+              </a:ext>
+            </a:extLst>
+          </a:blip>
+          <a:srcRect/>
+          <a:stretch>
+            <a:fillRect/>
+          </a:stretch>
+        </p:blipFill>
+        <p:spPr bwMode="auto">
+          <a:xfrm>
+            <a:off x="152400" y="1727200"/>
+            <a:ext cx="8780266" cy="4196080"/>
+          </a:xfrm>
+          <a:prstGeom prst="rect">
+            <a:avLst/>
+          </a:prstGeom>
+          <a:noFill/>
+          <a:extLst>
+            <a:ext uri="{909E8E84-426E-40DD-AFC4-6F175D3DCCD1}">
+              <a14:hiddenFill xmlns:a14="http://schemas.microsoft.com/office/drawing/2010/main">
+                <a:solidFill>
+                  <a:srgbClr val="FFFFFF"/>
+                </a:solidFill>
+              </a14:hiddenFill>
+            </a:ext>
+          </a:extLst>
+        </p:spPr>
+      </p:pic>
+    </p:spTree>
+    <p:extLst>
+      <p:ext uri="{BB962C8B-B14F-4D97-AF65-F5344CB8AC3E}">
+        <p14:creationId xmlns:p14="http://schemas.microsoft.com/office/powerpoint/2010/main" val="3205239270"/>
+      </p:ext>
+    </p:extLst>
+  </p:cSld>
+  <p:clrMapOvr>
+    <a:masterClrMapping/>
+  </p:clrMapOvr>
+</p:sld>
+</file>
+
+<file path=ppt/slides/slide13.xml><?xml version="1.0" encoding="utf-8"?>
 <p:sld xmlns:a="http://schemas.openxmlformats.org/drawingml/2006/main" xmlns:r="http://schemas.openxmlformats.org/officeDocument/2006/relationships" xmlns:p="http://schemas.openxmlformats.org/presentationml/2006/main">
   <p:cSld>
     <p:spTree>
@@ -8850,7 +9481,7 @@
           <p:nvPr/>
         </p:nvPicPr>
         <p:blipFill>
-          <a:blip r:embed="rId2">
+          <a:blip r:embed="rId3">
             <a:extLst>
               <a:ext uri="{28A0092B-C50C-407E-A947-70E740481C1C}">
                 <a14:useLocalDpi xmlns:a14="http://schemas.microsoft.com/office/drawing/2010/main" val="0"/>
